--- a/採用プロジェクト_資料.pptx
+++ b/採用プロジェクト_資料.pptx
@@ -774,7 +774,7 @@
           <a:p>
             <a:r>
               <a:rPr lang="en-US" dirty="0"/>
-              <a:t>統括：遠藤、プロジェクトリーダー：内山、実務担当：野澤、制度・労務担当：髙田部長。実務は野澤を中心に運営し、内山が運営を管理する。</a:t>
+              <a:t>統括：遠藤、プロジェクトリーダー：内山、実務担当：野澤、制度・労務担当：髙田部長、現場調整窓口：坂本。坂本は入社〜入社後のフォローとトラブル対応・現場調整の窓口を担う。実務は野澤を中心に運営し、内山が運営を管理する。</a:t>
             </a:r>
             <a:endParaRPr lang="en-US" dirty="0"/>
           </a:p>
@@ -950,7 +950,7 @@
           <a:p>
             <a:r>
               <a:rPr lang="en-US" dirty="0"/>
-              <a:t>遠藤は全体統括・経営報告。内山は運営・調整・進捗管理。野澤はネオキャリア窓口や媒体・応募者・面接の実務全般。髙田部長は制度設計・労務・雇用条件・社会保険の確認。</a:t>
+              <a:t>遠藤は全体統括・経営報告。内山は運営・調整・進捗管理。野澤はネオキャリア窓口や媒体・応募者・面接の実務全般。髙田部長は制度設計・労務・雇用条件・社会保険の確認。坂本は入社〜入社後のフォロー、現場調整の窓口、トラブル・相談対応、定着支援を担う。</a:t>
             </a:r>
             <a:endParaRPr lang="en-US" dirty="0"/>
           </a:p>
@@ -3561,7 +3561,7 @@
                 <a:ea typeface="Meiryo" pitchFamily="34" charset="-122"/>
                 <a:cs typeface="Meiryo" pitchFamily="34" charset="-120"/>
               </a:rPr>
-              <a:t>4つの役割で推進体制を構築</a:t>
+              <a:t>5つの役割で推進体制を構築</a:t>
             </a:r>
             <a:endParaRPr lang="en-US" sz="3200" dirty="0"/>
           </a:p>
@@ -3575,12 +3575,12 @@
         </p:nvSpPr>
         <p:spPr>
           <a:xfrm>
-            <a:off x="640080" y="1828800"/>
-            <a:ext cx="2724912" cy="3977640"/>
+            <a:off x="466344" y="1828800"/>
+            <a:ext cx="2112264" cy="3977640"/>
           </a:xfrm>
           <a:prstGeom prst="roundRect">
             <a:avLst>
-              <a:gd name="adj" fmla="val 2685"/>
+              <a:gd name="adj" fmla="val 3463"/>
             </a:avLst>
           </a:prstGeom>
           <a:solidFill>
@@ -3609,8 +3609,8 @@
         </p:nvSpPr>
         <p:spPr>
           <a:xfrm>
-            <a:off x="640080" y="1828800"/>
-            <a:ext cx="2724912" cy="868680"/>
+            <a:off x="466344" y="1828800"/>
+            <a:ext cx="2112264" cy="868680"/>
           </a:xfrm>
           <a:prstGeom prst="roundRect">
             <a:avLst>
@@ -3631,8 +3631,8 @@
         </p:nvSpPr>
         <p:spPr>
           <a:xfrm>
-            <a:off x="640080" y="2331720"/>
-            <a:ext cx="2724912" cy="365760"/>
+            <a:off x="466344" y="2331720"/>
+            <a:ext cx="2112264" cy="365760"/>
           </a:xfrm>
           <a:prstGeom prst="rect">
             <a:avLst/>
@@ -3651,8 +3651,8 @@
         </p:nvSpPr>
         <p:spPr>
           <a:xfrm>
-            <a:off x="777240" y="1874520"/>
-            <a:ext cx="2450592" cy="777240"/>
+            <a:off x="603504" y="1874520"/>
+            <a:ext cx="1837944" cy="777240"/>
           </a:xfrm>
           <a:prstGeom prst="rect">
             <a:avLst/>
@@ -3690,7 +3690,7 @@
         </p:nvSpPr>
         <p:spPr>
           <a:xfrm>
-            <a:off x="1453896" y="2926080"/>
+            <a:off x="973836" y="2926080"/>
             <a:ext cx="1097280" cy="1097280"/>
           </a:xfrm>
           <a:prstGeom prst="ellipse">
@@ -3715,7 +3715,7 @@
         </p:nvSpPr>
         <p:spPr>
           <a:xfrm>
-            <a:off x="1453896" y="2926080"/>
+            <a:off x="973836" y="2926080"/>
             <a:ext cx="1097280" cy="1097280"/>
           </a:xfrm>
           <a:prstGeom prst="rect">
@@ -3754,8 +3754,8 @@
         </p:nvSpPr>
         <p:spPr>
           <a:xfrm>
-            <a:off x="731520" y="4160520"/>
-            <a:ext cx="2542032" cy="457200"/>
+            <a:off x="557784" y="4160520"/>
+            <a:ext cx="1929384" cy="457200"/>
           </a:xfrm>
           <a:prstGeom prst="rect">
             <a:avLst/>
@@ -3793,8 +3793,8 @@
         </p:nvSpPr>
         <p:spPr>
           <a:xfrm>
-            <a:off x="1188720" y="4709160"/>
-            <a:ext cx="1627632" cy="0"/>
+            <a:off x="1014984" y="4709160"/>
+            <a:ext cx="1014984" cy="0"/>
           </a:xfrm>
           <a:prstGeom prst="line">
             <a:avLst/>
@@ -3816,8 +3816,8 @@
         </p:nvSpPr>
         <p:spPr>
           <a:xfrm>
-            <a:off x="777240" y="4846320"/>
-            <a:ext cx="2450592" cy="822960"/>
+            <a:off x="603504" y="4846320"/>
+            <a:ext cx="1837944" cy="822960"/>
           </a:xfrm>
           <a:prstGeom prst="rect">
             <a:avLst/>
@@ -3858,12 +3858,12 @@
         </p:nvSpPr>
         <p:spPr>
           <a:xfrm>
-            <a:off x="3538728" y="1828800"/>
-            <a:ext cx="2724912" cy="3977640"/>
+            <a:off x="2752344" y="1828800"/>
+            <a:ext cx="2112264" cy="3977640"/>
           </a:xfrm>
           <a:prstGeom prst="roundRect">
             <a:avLst>
-              <a:gd name="adj" fmla="val 2685"/>
+              <a:gd name="adj" fmla="val 3463"/>
             </a:avLst>
           </a:prstGeom>
           <a:solidFill>
@@ -3892,8 +3892,8 @@
         </p:nvSpPr>
         <p:spPr>
           <a:xfrm>
-            <a:off x="3538728" y="1828800"/>
-            <a:ext cx="2724912" cy="868680"/>
+            <a:off x="2752344" y="1828800"/>
+            <a:ext cx="2112264" cy="868680"/>
           </a:xfrm>
           <a:prstGeom prst="roundRect">
             <a:avLst>
@@ -3914,8 +3914,8 @@
         </p:nvSpPr>
         <p:spPr>
           <a:xfrm>
-            <a:off x="3538728" y="2331720"/>
-            <a:ext cx="2724912" cy="365760"/>
+            <a:off x="2752344" y="2331720"/>
+            <a:ext cx="2112264" cy="365760"/>
           </a:xfrm>
           <a:prstGeom prst="rect">
             <a:avLst/>
@@ -3934,8 +3934,8 @@
         </p:nvSpPr>
         <p:spPr>
           <a:xfrm>
-            <a:off x="3675888" y="1874520"/>
-            <a:ext cx="2450592" cy="777240"/>
+            <a:off x="2889504" y="1874520"/>
+            <a:ext cx="1837944" cy="777240"/>
           </a:xfrm>
           <a:prstGeom prst="rect">
             <a:avLst/>
@@ -3959,7 +3959,7 @@
                 <a:ea typeface="Meiryo" pitchFamily="34" charset="-122"/>
                 <a:cs typeface="Meiryo" pitchFamily="34" charset="-120"/>
               </a:rPr>
-              <a:t>プロジェクトリーダー</a:t>
+              <a:t>PMリーダー</a:t>
             </a:r>
             <a:endParaRPr lang="en-US" sz="1400" dirty="0"/>
           </a:p>
@@ -3973,7 +3973,7 @@
         </p:nvSpPr>
         <p:spPr>
           <a:xfrm>
-            <a:off x="4352544" y="2926080"/>
+            <a:off x="3259836" y="2926080"/>
             <a:ext cx="1097280" cy="1097280"/>
           </a:xfrm>
           <a:prstGeom prst="ellipse">
@@ -3998,7 +3998,7 @@
         </p:nvSpPr>
         <p:spPr>
           <a:xfrm>
-            <a:off x="4352544" y="2926080"/>
+            <a:off x="3259836" y="2926080"/>
             <a:ext cx="1097280" cy="1097280"/>
           </a:xfrm>
           <a:prstGeom prst="rect">
@@ -4037,8 +4037,8 @@
         </p:nvSpPr>
         <p:spPr>
           <a:xfrm>
-            <a:off x="3630168" y="4160520"/>
-            <a:ext cx="2542032" cy="457200"/>
+            <a:off x="2843784" y="4160520"/>
+            <a:ext cx="1929384" cy="457200"/>
           </a:xfrm>
           <a:prstGeom prst="rect">
             <a:avLst/>
@@ -4076,8 +4076,8 @@
         </p:nvSpPr>
         <p:spPr>
           <a:xfrm>
-            <a:off x="4087368" y="4709160"/>
-            <a:ext cx="1627632" cy="0"/>
+            <a:off x="3300984" y="4709160"/>
+            <a:ext cx="1014984" cy="0"/>
           </a:xfrm>
           <a:prstGeom prst="line">
             <a:avLst/>
@@ -4099,8 +4099,8 @@
         </p:nvSpPr>
         <p:spPr>
           <a:xfrm>
-            <a:off x="3675888" y="4846320"/>
-            <a:ext cx="2450592" cy="822960"/>
+            <a:off x="2889504" y="4846320"/>
+            <a:ext cx="1837944" cy="822960"/>
           </a:xfrm>
           <a:prstGeom prst="rect">
             <a:avLst/>
@@ -4141,12 +4141,12 @@
         </p:nvSpPr>
         <p:spPr>
           <a:xfrm>
-            <a:off x="6437376" y="1828800"/>
-            <a:ext cx="2724912" cy="3977640"/>
+            <a:off x="5038344" y="1828800"/>
+            <a:ext cx="2112264" cy="3977640"/>
           </a:xfrm>
           <a:prstGeom prst="roundRect">
             <a:avLst>
-              <a:gd name="adj" fmla="val 2685"/>
+              <a:gd name="adj" fmla="val 3463"/>
             </a:avLst>
           </a:prstGeom>
           <a:solidFill>
@@ -4175,8 +4175,8 @@
         </p:nvSpPr>
         <p:spPr>
           <a:xfrm>
-            <a:off x="6437376" y="1828800"/>
-            <a:ext cx="2724912" cy="868680"/>
+            <a:off x="5038344" y="1828800"/>
+            <a:ext cx="2112264" cy="868680"/>
           </a:xfrm>
           <a:prstGeom prst="roundRect">
             <a:avLst>
@@ -4197,8 +4197,8 @@
         </p:nvSpPr>
         <p:spPr>
           <a:xfrm>
-            <a:off x="6437376" y="2331720"/>
-            <a:ext cx="2724912" cy="365760"/>
+            <a:off x="5038344" y="2331720"/>
+            <a:ext cx="2112264" cy="365760"/>
           </a:xfrm>
           <a:prstGeom prst="rect">
             <a:avLst/>
@@ -4217,8 +4217,8 @@
         </p:nvSpPr>
         <p:spPr>
           <a:xfrm>
-            <a:off x="6574536" y="1874520"/>
-            <a:ext cx="2450592" cy="777240"/>
+            <a:off x="5175504" y="1874520"/>
+            <a:ext cx="1837944" cy="777240"/>
           </a:xfrm>
           <a:prstGeom prst="rect">
             <a:avLst/>
@@ -4256,7 +4256,7 @@
         </p:nvSpPr>
         <p:spPr>
           <a:xfrm>
-            <a:off x="7251192" y="2926080"/>
+            <a:off x="5545836" y="2926080"/>
             <a:ext cx="1097280" cy="1097280"/>
           </a:xfrm>
           <a:prstGeom prst="ellipse">
@@ -4281,7 +4281,7 @@
         </p:nvSpPr>
         <p:spPr>
           <a:xfrm>
-            <a:off x="7251192" y="2926080"/>
+            <a:off x="5545836" y="2926080"/>
             <a:ext cx="1097280" cy="1097280"/>
           </a:xfrm>
           <a:prstGeom prst="rect">
@@ -4320,8 +4320,8 @@
         </p:nvSpPr>
         <p:spPr>
           <a:xfrm>
-            <a:off x="6528816" y="4160520"/>
-            <a:ext cx="2542032" cy="457200"/>
+            <a:off x="5129784" y="4160520"/>
+            <a:ext cx="1929384" cy="457200"/>
           </a:xfrm>
           <a:prstGeom prst="rect">
             <a:avLst/>
@@ -4359,8 +4359,8 @@
         </p:nvSpPr>
         <p:spPr>
           <a:xfrm>
-            <a:off x="6986016" y="4709160"/>
-            <a:ext cx="1627632" cy="0"/>
+            <a:off x="5586984" y="4709160"/>
+            <a:ext cx="1014984" cy="0"/>
           </a:xfrm>
           <a:prstGeom prst="line">
             <a:avLst/>
@@ -4382,8 +4382,8 @@
         </p:nvSpPr>
         <p:spPr>
           <a:xfrm>
-            <a:off x="6574536" y="4846320"/>
-            <a:ext cx="2450592" cy="822960"/>
+            <a:off x="5175504" y="4846320"/>
+            <a:ext cx="1837944" cy="822960"/>
           </a:xfrm>
           <a:prstGeom prst="rect">
             <a:avLst/>
@@ -4424,12 +4424,12 @@
         </p:nvSpPr>
         <p:spPr>
           <a:xfrm>
-            <a:off x="9336024" y="1828800"/>
-            <a:ext cx="2724912" cy="3977640"/>
+            <a:off x="7324344" y="1828800"/>
+            <a:ext cx="2112264" cy="3977640"/>
           </a:xfrm>
           <a:prstGeom prst="roundRect">
             <a:avLst>
-              <a:gd name="adj" fmla="val 2685"/>
+              <a:gd name="adj" fmla="val 3463"/>
             </a:avLst>
           </a:prstGeom>
           <a:solidFill>
@@ -4458,8 +4458,8 @@
         </p:nvSpPr>
         <p:spPr>
           <a:xfrm>
-            <a:off x="9336024" y="1828800"/>
-            <a:ext cx="2724912" cy="868680"/>
+            <a:off x="7324344" y="1828800"/>
+            <a:ext cx="2112264" cy="868680"/>
           </a:xfrm>
           <a:prstGeom prst="roundRect">
             <a:avLst>
@@ -4480,8 +4480,8 @@
         </p:nvSpPr>
         <p:spPr>
           <a:xfrm>
-            <a:off x="9336024" y="2331720"/>
-            <a:ext cx="2724912" cy="365760"/>
+            <a:off x="7324344" y="2331720"/>
+            <a:ext cx="2112264" cy="365760"/>
           </a:xfrm>
           <a:prstGeom prst="rect">
             <a:avLst/>
@@ -4500,8 +4500,8 @@
         </p:nvSpPr>
         <p:spPr>
           <a:xfrm>
-            <a:off x="9473184" y="1874520"/>
-            <a:ext cx="2450592" cy="777240"/>
+            <a:off x="7461504" y="1874520"/>
+            <a:ext cx="1837944" cy="777240"/>
           </a:xfrm>
           <a:prstGeom prst="rect">
             <a:avLst/>
@@ -4525,7 +4525,7 @@
                 <a:ea typeface="Meiryo" pitchFamily="34" charset="-122"/>
                 <a:cs typeface="Meiryo" pitchFamily="34" charset="-120"/>
               </a:rPr>
-              <a:t>制度・労務担当</a:t>
+              <a:t>制度・労務</a:t>
             </a:r>
             <a:endParaRPr lang="en-US" sz="1400" dirty="0"/>
           </a:p>
@@ -4539,7 +4539,7 @@
         </p:nvSpPr>
         <p:spPr>
           <a:xfrm>
-            <a:off x="10149840" y="2926080"/>
+            <a:off x="7831836" y="2926080"/>
             <a:ext cx="1097280" cy="1097280"/>
           </a:xfrm>
           <a:prstGeom prst="ellipse">
@@ -4564,7 +4564,7 @@
         </p:nvSpPr>
         <p:spPr>
           <a:xfrm>
-            <a:off x="10149840" y="2926080"/>
+            <a:off x="7831836" y="2926080"/>
             <a:ext cx="1097280" cy="1097280"/>
           </a:xfrm>
           <a:prstGeom prst="rect">
@@ -4603,8 +4603,8 @@
         </p:nvSpPr>
         <p:spPr>
           <a:xfrm>
-            <a:off x="9427464" y="4160520"/>
-            <a:ext cx="2542032" cy="457200"/>
+            <a:off x="7415784" y="4160520"/>
+            <a:ext cx="1929384" cy="457200"/>
           </a:xfrm>
           <a:prstGeom prst="rect">
             <a:avLst/>
@@ -4642,8 +4642,8 @@
         </p:nvSpPr>
         <p:spPr>
           <a:xfrm>
-            <a:off x="9884664" y="4709160"/>
-            <a:ext cx="1627632" cy="0"/>
+            <a:off x="7872984" y="4709160"/>
+            <a:ext cx="1014984" cy="0"/>
           </a:xfrm>
           <a:prstGeom prst="line">
             <a:avLst/>
@@ -4665,8 +4665,8 @@
         </p:nvSpPr>
         <p:spPr>
           <a:xfrm>
-            <a:off x="9473184" y="4846320"/>
-            <a:ext cx="2450592" cy="822960"/>
+            <a:off x="7461504" y="4846320"/>
+            <a:ext cx="1837944" cy="822960"/>
           </a:xfrm>
           <a:prstGeom prst="rect">
             <a:avLst/>
@@ -4701,7 +4701,290 @@
       </p:sp>
       <p:sp>
         <p:nvSpPr>
-          <p:cNvPr id="40" name="Text 38"/>
+          <p:cNvPr id="40" name="Shape 38"/>
+          <p:cNvSpPr/>
+          <p:nvPr/>
+        </p:nvSpPr>
+        <p:spPr>
+          <a:xfrm>
+            <a:off x="9610344" y="1828800"/>
+            <a:ext cx="2112264" cy="3977640"/>
+          </a:xfrm>
+          <a:prstGeom prst="roundRect">
+            <a:avLst>
+              <a:gd name="adj" fmla="val 3463"/>
+            </a:avLst>
+          </a:prstGeom>
+          <a:solidFill>
+            <a:srgbClr val="FFFFFF"/>
+          </a:solidFill>
+          <a:ln w="12700">
+            <a:solidFill>
+              <a:srgbClr val="D5DEEC"/>
+            </a:solidFill>
+            <a:prstDash val="solid"/>
+          </a:ln>
+          <a:effectLst>
+            <a:outerShdw sx="100000" sy="100000" kx="0" ky="0" algn="bl" rotWithShape="0" blurRad="101600" dist="25400" dir="5400000">
+              <a:srgbClr val="9AA7BC">
+                <a:alpha val="35000"/>
+              </a:srgbClr>
+            </a:outerShdw>
+          </a:effectLst>
+        </p:spPr>
+      </p:sp>
+      <p:sp>
+        <p:nvSpPr>
+          <p:cNvPr id="41" name="Shape 39"/>
+          <p:cNvSpPr/>
+          <p:nvPr/>
+        </p:nvSpPr>
+        <p:spPr>
+          <a:xfrm>
+            <a:off x="9610344" y="1828800"/>
+            <a:ext cx="2112264" cy="868680"/>
+          </a:xfrm>
+          <a:prstGeom prst="roundRect">
+            <a:avLst>
+              <a:gd name="adj" fmla="val 8421"/>
+            </a:avLst>
+          </a:prstGeom>
+          <a:solidFill>
+            <a:srgbClr val="6D5B9C"/>
+          </a:solidFill>
+          <a:ln/>
+        </p:spPr>
+      </p:sp>
+      <p:sp>
+        <p:nvSpPr>
+          <p:cNvPr id="42" name="Shape 40"/>
+          <p:cNvSpPr/>
+          <p:nvPr/>
+        </p:nvSpPr>
+        <p:spPr>
+          <a:xfrm>
+            <a:off x="9610344" y="2331720"/>
+            <a:ext cx="2112264" cy="365760"/>
+          </a:xfrm>
+          <a:prstGeom prst="rect">
+            <a:avLst/>
+          </a:prstGeom>
+          <a:solidFill>
+            <a:srgbClr val="6D5B9C"/>
+          </a:solidFill>
+          <a:ln/>
+        </p:spPr>
+      </p:sp>
+      <p:sp>
+        <p:nvSpPr>
+          <p:cNvPr id="43" name="Text 41"/>
+          <p:cNvSpPr/>
+          <p:nvPr/>
+        </p:nvSpPr>
+        <p:spPr>
+          <a:xfrm>
+            <a:off x="9747504" y="1874520"/>
+            <a:ext cx="1837944" cy="777240"/>
+          </a:xfrm>
+          <a:prstGeom prst="rect">
+            <a:avLst/>
+          </a:prstGeom>
+          <a:noFill/>
+          <a:ln/>
+        </p:spPr>
+        <p:txBody>
+          <a:bodyPr wrap="square" lIns="0" tIns="0" rIns="0" bIns="0" rtlCol="0" anchor="ctr"/>
+          <a:lstStyle/>
+          <a:p>
+            <a:pPr algn="ctr" indent="0" marL="0">
+              <a:buNone/>
+            </a:pPr>
+            <a:r>
+              <a:rPr lang="en-US" sz="1400" b="1" dirty="0">
+                <a:solidFill>
+                  <a:srgbClr val="FFFFFF"/>
+                </a:solidFill>
+                <a:latin typeface="Meiryo" pitchFamily="34" charset="0"/>
+                <a:ea typeface="Meiryo" pitchFamily="34" charset="-122"/>
+                <a:cs typeface="Meiryo" pitchFamily="34" charset="-120"/>
+              </a:rPr>
+              <a:t>現場調整窓口</a:t>
+            </a:r>
+            <a:endParaRPr lang="en-US" sz="1400" dirty="0"/>
+          </a:p>
+        </p:txBody>
+      </p:sp>
+      <p:sp>
+        <p:nvSpPr>
+          <p:cNvPr id="44" name="Shape 42"/>
+          <p:cNvSpPr/>
+          <p:nvPr/>
+        </p:nvSpPr>
+        <p:spPr>
+          <a:xfrm>
+            <a:off x="10117836" y="2926080"/>
+            <a:ext cx="1097280" cy="1097280"/>
+          </a:xfrm>
+          <a:prstGeom prst="ellipse">
+            <a:avLst/>
+          </a:prstGeom>
+          <a:solidFill>
+            <a:srgbClr val="F4F7FB"/>
+          </a:solidFill>
+          <a:ln w="25400">
+            <a:solidFill>
+              <a:srgbClr val="6D5B9C"/>
+            </a:solidFill>
+            <a:prstDash val="solid"/>
+          </a:ln>
+        </p:spPr>
+      </p:sp>
+      <p:sp>
+        <p:nvSpPr>
+          <p:cNvPr id="45" name="Text 43"/>
+          <p:cNvSpPr/>
+          <p:nvPr/>
+        </p:nvSpPr>
+        <p:spPr>
+          <a:xfrm>
+            <a:off x="10117836" y="2926080"/>
+            <a:ext cx="1097280" cy="1097280"/>
+          </a:xfrm>
+          <a:prstGeom prst="rect">
+            <a:avLst/>
+          </a:prstGeom>
+          <a:noFill/>
+          <a:ln/>
+        </p:spPr>
+        <p:txBody>
+          <a:bodyPr wrap="square" lIns="0" tIns="0" rIns="0" bIns="0" rtlCol="0" anchor="ctr"/>
+          <a:lstStyle/>
+          <a:p>
+            <a:pPr algn="ctr" indent="0" marL="0">
+              <a:buNone/>
+            </a:pPr>
+            <a:r>
+              <a:rPr lang="en-US" sz="3400" b="1" dirty="0">
+                <a:solidFill>
+                  <a:srgbClr val="6D5B9C"/>
+                </a:solidFill>
+                <a:latin typeface="Meiryo" pitchFamily="34" charset="0"/>
+                <a:ea typeface="Meiryo" pitchFamily="34" charset="-122"/>
+                <a:cs typeface="Meiryo" pitchFamily="34" charset="-120"/>
+              </a:rPr>
+              <a:t>坂</a:t>
+            </a:r>
+            <a:endParaRPr lang="en-US" sz="3400" dirty="0"/>
+          </a:p>
+        </p:txBody>
+      </p:sp>
+      <p:sp>
+        <p:nvSpPr>
+          <p:cNvPr id="46" name="Text 44"/>
+          <p:cNvSpPr/>
+          <p:nvPr/>
+        </p:nvSpPr>
+        <p:spPr>
+          <a:xfrm>
+            <a:off x="9701784" y="4160520"/>
+            <a:ext cx="1929384" cy="457200"/>
+          </a:xfrm>
+          <a:prstGeom prst="rect">
+            <a:avLst/>
+          </a:prstGeom>
+          <a:noFill/>
+          <a:ln/>
+        </p:spPr>
+        <p:txBody>
+          <a:bodyPr wrap="square" lIns="0" tIns="0" rIns="0" bIns="0" rtlCol="0" anchor="ctr"/>
+          <a:lstStyle/>
+          <a:p>
+            <a:pPr algn="ctr" indent="0" marL="0">
+              <a:buNone/>
+            </a:pPr>
+            <a:r>
+              <a:rPr lang="en-US" sz="2000" b="1" dirty="0">
+                <a:solidFill>
+                  <a:srgbClr val="1A2233"/>
+                </a:solidFill>
+                <a:latin typeface="Meiryo" pitchFamily="34" charset="0"/>
+                <a:ea typeface="Meiryo" pitchFamily="34" charset="-122"/>
+                <a:cs typeface="Meiryo" pitchFamily="34" charset="-120"/>
+              </a:rPr>
+              <a:t>坂本</a:t>
+            </a:r>
+            <a:endParaRPr lang="en-US" sz="2000" dirty="0"/>
+          </a:p>
+        </p:txBody>
+      </p:sp>
+      <p:sp>
+        <p:nvSpPr>
+          <p:cNvPr id="47" name="Shape 45"/>
+          <p:cNvSpPr/>
+          <p:nvPr/>
+        </p:nvSpPr>
+        <p:spPr>
+          <a:xfrm>
+            <a:off x="10158984" y="4709160"/>
+            <a:ext cx="1014984" cy="0"/>
+          </a:xfrm>
+          <a:prstGeom prst="line">
+            <a:avLst/>
+          </a:prstGeom>
+          <a:noFill/>
+          <a:ln w="12700">
+            <a:solidFill>
+              <a:srgbClr val="D5DEEC"/>
+            </a:solidFill>
+            <a:prstDash val="solid"/>
+          </a:ln>
+        </p:spPr>
+      </p:sp>
+      <p:sp>
+        <p:nvSpPr>
+          <p:cNvPr id="48" name="Text 46"/>
+          <p:cNvSpPr/>
+          <p:nvPr/>
+        </p:nvSpPr>
+        <p:spPr>
+          <a:xfrm>
+            <a:off x="9747504" y="4846320"/>
+            <a:ext cx="1837944" cy="822960"/>
+          </a:xfrm>
+          <a:prstGeom prst="rect">
+            <a:avLst/>
+          </a:prstGeom>
+          <a:noFill/>
+          <a:ln/>
+        </p:spPr>
+        <p:txBody>
+          <a:bodyPr wrap="square" lIns="0" tIns="0" rIns="0" bIns="0" rtlCol="0" anchor="ctr"/>
+          <a:lstStyle/>
+          <a:p>
+            <a:pPr algn="ctr" indent="0" marL="0">
+              <a:lnSpc>
+                <a:spcPts val="1700"/>
+              </a:lnSpc>
+              <a:buNone/>
+            </a:pPr>
+            <a:r>
+              <a:rPr lang="en-US" sz="1250" dirty="0">
+                <a:solidFill>
+                  <a:srgbClr val="6B7A90"/>
+                </a:solidFill>
+                <a:latin typeface="Meiryo" pitchFamily="34" charset="0"/>
+                <a:ea typeface="Meiryo" pitchFamily="34" charset="-122"/>
+                <a:cs typeface="Meiryo" pitchFamily="34" charset="-120"/>
+              </a:rPr>
+              <a:t>入社後フォロー・調整</a:t>
+            </a:r>
+            <a:endParaRPr lang="en-US" sz="1250" dirty="0"/>
+          </a:p>
+        </p:txBody>
+      </p:sp>
+      <p:sp>
+        <p:nvSpPr>
+          <p:cNvPr id="49" name="Text 47"/>
           <p:cNvSpPr/>
           <p:nvPr/>
         </p:nvSpPr>
@@ -4740,7 +5023,7 @@
       </p:sp>
       <p:sp>
         <p:nvSpPr>
-          <p:cNvPr id="41" name="Text 39"/>
+          <p:cNvPr id="50" name="Text 48"/>
           <p:cNvSpPr/>
           <p:nvPr/>
         </p:nvSpPr>
@@ -5936,12 +6219,12 @@
         </p:nvSpPr>
         <p:spPr>
           <a:xfrm>
-            <a:off x="640080" y="1783080"/>
-            <a:ext cx="2724912" cy="4160520"/>
+            <a:off x="466344" y="1783080"/>
+            <a:ext cx="2112264" cy="4160520"/>
           </a:xfrm>
           <a:prstGeom prst="roundRect">
             <a:avLst>
-              <a:gd name="adj" fmla="val 2685"/>
+              <a:gd name="adj" fmla="val 3463"/>
             </a:avLst>
           </a:prstGeom>
           <a:solidFill>
@@ -5970,7 +6253,7 @@
         </p:nvSpPr>
         <p:spPr>
           <a:xfrm>
-            <a:off x="896112" y="2011680"/>
+            <a:off x="722376" y="2011680"/>
             <a:ext cx="457200" cy="457200"/>
           </a:xfrm>
           <a:prstGeom prst="ellipse">
@@ -5990,8 +6273,8 @@
         </p:nvSpPr>
         <p:spPr>
           <a:xfrm>
-            <a:off x="1463040" y="1993392"/>
-            <a:ext cx="1810512" cy="320040"/>
+            <a:off x="1289304" y="1993392"/>
+            <a:ext cx="1197864" cy="320040"/>
           </a:xfrm>
           <a:prstGeom prst="rect">
             <a:avLst/>
@@ -6029,8 +6312,8 @@
         </p:nvSpPr>
         <p:spPr>
           <a:xfrm>
-            <a:off x="1463040" y="2304288"/>
-            <a:ext cx="1810512" cy="256032"/>
+            <a:off x="1289304" y="2304288"/>
+            <a:ext cx="1197864" cy="256032"/>
           </a:xfrm>
           <a:prstGeom prst="rect">
             <a:avLst/>
@@ -6068,8 +6351,8 @@
         </p:nvSpPr>
         <p:spPr>
           <a:xfrm>
-            <a:off x="896112" y="2743200"/>
-            <a:ext cx="2212848" cy="0"/>
+            <a:off x="722376" y="2743200"/>
+            <a:ext cx="1600200" cy="0"/>
           </a:xfrm>
           <a:prstGeom prst="line">
             <a:avLst/>
@@ -6091,8 +6374,8 @@
         </p:nvSpPr>
         <p:spPr>
           <a:xfrm>
-            <a:off x="896112" y="2880360"/>
-            <a:ext cx="2267712" cy="2880360"/>
+            <a:off x="704088" y="2880360"/>
+            <a:ext cx="1691640" cy="2926080"/>
           </a:xfrm>
           <a:prstGeom prst="rect">
             <a:avLst/>
@@ -6104,18 +6387,18 @@
           <a:bodyPr wrap="square" lIns="0" tIns="0" rIns="0" bIns="0" rtlCol="0" anchor="t"/>
           <a:lstStyle/>
           <a:p>
-            <a:pPr marL="152400" indent="-152400">
+            <a:pPr marL="139700" indent="-139700">
               <a:lnSpc>
-                <a:spcPts val="1500"/>
+                <a:spcPts val="1400"/>
               </a:lnSpc>
               <a:spcAft>
-                <a:spcPts val="800"/>
+                <a:spcPts val="700"/>
               </a:spcAft>
               <a:buSzPct val="100000"/>
               <a:buChar char="•"/>
             </a:pPr>
             <a:r>
-              <a:rPr lang="en-US" sz="1200" dirty="0">
+              <a:rPr lang="en-US" sz="1100" dirty="0">
                 <a:solidFill>
                   <a:srgbClr val="1A2233"/>
                 </a:solidFill>
@@ -6125,21 +6408,21 @@
               </a:rPr>
               <a:t>プロジェクト全体統括</a:t>
             </a:r>
-            <a:endParaRPr lang="en-US" sz="1200" dirty="0"/>
-          </a:p>
-          <a:p>
-            <a:pPr marL="152400" indent="-152400">
+            <a:endParaRPr lang="en-US" sz="1100" dirty="0"/>
+          </a:p>
+          <a:p>
+            <a:pPr marL="139700" indent="-139700">
               <a:lnSpc>
-                <a:spcPts val="1500"/>
+                <a:spcPts val="1400"/>
               </a:lnSpc>
               <a:spcAft>
-                <a:spcPts val="800"/>
+                <a:spcPts val="700"/>
               </a:spcAft>
               <a:buSzPct val="100000"/>
               <a:buChar char="•"/>
             </a:pPr>
             <a:r>
-              <a:rPr lang="en-US" sz="1200" dirty="0">
+              <a:rPr lang="en-US" sz="1100" dirty="0">
                 <a:solidFill>
                   <a:srgbClr val="1A2233"/>
                 </a:solidFill>
@@ -6149,21 +6432,21 @@
               </a:rPr>
               <a:t>採用目標管理・進捗確認</a:t>
             </a:r>
-            <a:endParaRPr lang="en-US" sz="1200" dirty="0"/>
-          </a:p>
-          <a:p>
-            <a:pPr marL="152400" indent="-152400">
+            <a:endParaRPr lang="en-US" sz="1100" dirty="0"/>
+          </a:p>
+          <a:p>
+            <a:pPr marL="139700" indent="-139700">
               <a:lnSpc>
-                <a:spcPts val="1500"/>
+                <a:spcPts val="1400"/>
               </a:lnSpc>
               <a:spcAft>
-                <a:spcPts val="800"/>
+                <a:spcPts val="700"/>
               </a:spcAft>
               <a:buSzPct val="100000"/>
               <a:buChar char="•"/>
             </a:pPr>
             <a:r>
-              <a:rPr lang="en-US" sz="1200" dirty="0">
+              <a:rPr lang="en-US" sz="1100" dirty="0">
                 <a:solidFill>
                   <a:srgbClr val="1A2233"/>
                 </a:solidFill>
@@ -6173,21 +6456,21 @@
               </a:rPr>
               <a:t>課題抽出、改善指示</a:t>
             </a:r>
-            <a:endParaRPr lang="en-US" sz="1200" dirty="0"/>
-          </a:p>
-          <a:p>
-            <a:pPr marL="152400" indent="-152400">
+            <a:endParaRPr lang="en-US" sz="1100" dirty="0"/>
+          </a:p>
+          <a:p>
+            <a:pPr marL="139700" indent="-139700">
               <a:lnSpc>
-                <a:spcPts val="1500"/>
+                <a:spcPts val="1400"/>
               </a:lnSpc>
               <a:spcAft>
-                <a:spcPts val="800"/>
+                <a:spcPts val="700"/>
               </a:spcAft>
               <a:buSzPct val="100000"/>
               <a:buChar char="•"/>
             </a:pPr>
             <a:r>
-              <a:rPr lang="en-US" sz="1200" dirty="0">
+              <a:rPr lang="en-US" sz="1100" dirty="0">
                 <a:solidFill>
                   <a:srgbClr val="1A2233"/>
                 </a:solidFill>
@@ -6197,7 +6480,7 @@
               </a:rPr>
               <a:t>経営層への報告</a:t>
             </a:r>
-            <a:endParaRPr lang="en-US" sz="1200" dirty="0"/>
+            <a:endParaRPr lang="en-US" sz="1100" dirty="0"/>
           </a:p>
         </p:txBody>
       </p:sp>
@@ -6209,12 +6492,12 @@
         </p:nvSpPr>
         <p:spPr>
           <a:xfrm>
-            <a:off x="3538728" y="1783080"/>
-            <a:ext cx="2724912" cy="4160520"/>
+            <a:off x="2752344" y="1783080"/>
+            <a:ext cx="2112264" cy="4160520"/>
           </a:xfrm>
           <a:prstGeom prst="roundRect">
             <a:avLst>
-              <a:gd name="adj" fmla="val 2685"/>
+              <a:gd name="adj" fmla="val 3463"/>
             </a:avLst>
           </a:prstGeom>
           <a:solidFill>
@@ -6243,7 +6526,7 @@
         </p:nvSpPr>
         <p:spPr>
           <a:xfrm>
-            <a:off x="3794760" y="2011680"/>
+            <a:off x="3008376" y="2011680"/>
             <a:ext cx="457200" cy="457200"/>
           </a:xfrm>
           <a:prstGeom prst="ellipse">
@@ -6263,8 +6546,8 @@
         </p:nvSpPr>
         <p:spPr>
           <a:xfrm>
-            <a:off x="4361688" y="1993392"/>
-            <a:ext cx="1810512" cy="320040"/>
+            <a:off x="3575304" y="1993392"/>
+            <a:ext cx="1197864" cy="320040"/>
           </a:xfrm>
           <a:prstGeom prst="rect">
             <a:avLst/>
@@ -6302,8 +6585,8 @@
         </p:nvSpPr>
         <p:spPr>
           <a:xfrm>
-            <a:off x="4361688" y="2304288"/>
-            <a:ext cx="1810512" cy="256032"/>
+            <a:off x="3575304" y="2304288"/>
+            <a:ext cx="1197864" cy="256032"/>
           </a:xfrm>
           <a:prstGeom prst="rect">
             <a:avLst/>
@@ -6341,8 +6624,8 @@
         </p:nvSpPr>
         <p:spPr>
           <a:xfrm>
-            <a:off x="3794760" y="2743200"/>
-            <a:ext cx="2212848" cy="0"/>
+            <a:off x="3008376" y="2743200"/>
+            <a:ext cx="1600200" cy="0"/>
           </a:xfrm>
           <a:prstGeom prst="line">
             <a:avLst/>
@@ -6364,8 +6647,8 @@
         </p:nvSpPr>
         <p:spPr>
           <a:xfrm>
-            <a:off x="3794760" y="2880360"/>
-            <a:ext cx="2267712" cy="2880360"/>
+            <a:off x="2990088" y="2880360"/>
+            <a:ext cx="1691640" cy="2926080"/>
           </a:xfrm>
           <a:prstGeom prst="rect">
             <a:avLst/>
@@ -6377,18 +6660,18 @@
           <a:bodyPr wrap="square" lIns="0" tIns="0" rIns="0" bIns="0" rtlCol="0" anchor="t"/>
           <a:lstStyle/>
           <a:p>
-            <a:pPr marL="152400" indent="-152400">
+            <a:pPr marL="139700" indent="-139700">
               <a:lnSpc>
-                <a:spcPts val="1500"/>
+                <a:spcPts val="1400"/>
               </a:lnSpc>
               <a:spcAft>
-                <a:spcPts val="800"/>
+                <a:spcPts val="700"/>
               </a:spcAft>
               <a:buSzPct val="100000"/>
               <a:buChar char="•"/>
             </a:pPr>
             <a:r>
-              <a:rPr lang="en-US" sz="1200" dirty="0">
+              <a:rPr lang="en-US" sz="1100" dirty="0">
                 <a:solidFill>
                   <a:srgbClr val="1A2233"/>
                 </a:solidFill>
@@ -6398,21 +6681,21 @@
               </a:rPr>
               <a:t>プロジェクト運営</a:t>
             </a:r>
-            <a:endParaRPr lang="en-US" sz="1200" dirty="0"/>
-          </a:p>
-          <a:p>
-            <a:pPr marL="152400" indent="-152400">
+            <a:endParaRPr lang="en-US" sz="1100" dirty="0"/>
+          </a:p>
+          <a:p>
+            <a:pPr marL="139700" indent="-139700">
               <a:lnSpc>
-                <a:spcPts val="1500"/>
+                <a:spcPts val="1400"/>
               </a:lnSpc>
               <a:spcAft>
-                <a:spcPts val="800"/>
+                <a:spcPts val="700"/>
               </a:spcAft>
               <a:buSzPct val="100000"/>
               <a:buChar char="•"/>
             </a:pPr>
             <a:r>
-              <a:rPr lang="en-US" sz="1200" dirty="0">
+              <a:rPr lang="en-US" sz="1100" dirty="0">
                 <a:solidFill>
                   <a:srgbClr val="1A2233"/>
                 </a:solidFill>
@@ -6422,21 +6705,21 @@
               </a:rPr>
               <a:t>現場との調整</a:t>
             </a:r>
-            <a:endParaRPr lang="en-US" sz="1200" dirty="0"/>
-          </a:p>
-          <a:p>
-            <a:pPr marL="152400" indent="-152400">
+            <a:endParaRPr lang="en-US" sz="1100" dirty="0"/>
+          </a:p>
+          <a:p>
+            <a:pPr marL="139700" indent="-139700">
               <a:lnSpc>
-                <a:spcPts val="1500"/>
+                <a:spcPts val="1400"/>
               </a:lnSpc>
               <a:spcAft>
-                <a:spcPts val="800"/>
+                <a:spcPts val="700"/>
               </a:spcAft>
               <a:buSzPct val="100000"/>
               <a:buChar char="•"/>
             </a:pPr>
             <a:r>
-              <a:rPr lang="en-US" sz="1200" dirty="0">
+              <a:rPr lang="en-US" sz="1100" dirty="0">
                 <a:solidFill>
                   <a:srgbClr val="1A2233"/>
                 </a:solidFill>
@@ -6446,21 +6729,21 @@
               </a:rPr>
               <a:t>面接対応</a:t>
             </a:r>
-            <a:endParaRPr lang="en-US" sz="1200" dirty="0"/>
-          </a:p>
-          <a:p>
-            <a:pPr marL="152400" indent="-152400">
+            <a:endParaRPr lang="en-US" sz="1100" dirty="0"/>
+          </a:p>
+          <a:p>
+            <a:pPr marL="139700" indent="-139700">
               <a:lnSpc>
-                <a:spcPts val="1500"/>
+                <a:spcPts val="1400"/>
               </a:lnSpc>
               <a:spcAft>
-                <a:spcPts val="800"/>
+                <a:spcPts val="700"/>
               </a:spcAft>
               <a:buSzPct val="100000"/>
               <a:buChar char="•"/>
             </a:pPr>
             <a:r>
-              <a:rPr lang="en-US" sz="1200" dirty="0">
+              <a:rPr lang="en-US" sz="1100" dirty="0">
                 <a:solidFill>
                   <a:srgbClr val="1A2233"/>
                 </a:solidFill>
@@ -6470,7 +6753,7 @@
               </a:rPr>
               <a:t>進捗管理</a:t>
             </a:r>
-            <a:endParaRPr lang="en-US" sz="1200" dirty="0"/>
+            <a:endParaRPr lang="en-US" sz="1100" dirty="0"/>
           </a:p>
         </p:txBody>
       </p:sp>
@@ -6482,12 +6765,12 @@
         </p:nvSpPr>
         <p:spPr>
           <a:xfrm>
-            <a:off x="6437376" y="1783080"/>
-            <a:ext cx="2724912" cy="4160520"/>
+            <a:off x="5038344" y="1783080"/>
+            <a:ext cx="2112264" cy="4160520"/>
           </a:xfrm>
           <a:prstGeom prst="roundRect">
             <a:avLst>
-              <a:gd name="adj" fmla="val 2685"/>
+              <a:gd name="adj" fmla="val 3463"/>
             </a:avLst>
           </a:prstGeom>
           <a:solidFill>
@@ -6516,7 +6799,7 @@
         </p:nvSpPr>
         <p:spPr>
           <a:xfrm>
-            <a:off x="6693408" y="2011680"/>
+            <a:off x="5294376" y="2011680"/>
             <a:ext cx="457200" cy="457200"/>
           </a:xfrm>
           <a:prstGeom prst="ellipse">
@@ -6536,8 +6819,8 @@
         </p:nvSpPr>
         <p:spPr>
           <a:xfrm>
-            <a:off x="7260336" y="1993392"/>
-            <a:ext cx="1810512" cy="320040"/>
+            <a:off x="5861304" y="1993392"/>
+            <a:ext cx="1197864" cy="320040"/>
           </a:xfrm>
           <a:prstGeom prst="rect">
             <a:avLst/>
@@ -6575,8 +6858,8 @@
         </p:nvSpPr>
         <p:spPr>
           <a:xfrm>
-            <a:off x="7260336" y="2304288"/>
-            <a:ext cx="1810512" cy="256032"/>
+            <a:off x="5861304" y="2304288"/>
+            <a:ext cx="1197864" cy="256032"/>
           </a:xfrm>
           <a:prstGeom prst="rect">
             <a:avLst/>
@@ -6614,8 +6897,8 @@
         </p:nvSpPr>
         <p:spPr>
           <a:xfrm>
-            <a:off x="6693408" y="2743200"/>
-            <a:ext cx="2212848" cy="0"/>
+            <a:off x="5294376" y="2743200"/>
+            <a:ext cx="1600200" cy="0"/>
           </a:xfrm>
           <a:prstGeom prst="line">
             <a:avLst/>
@@ -6637,8 +6920,8 @@
         </p:nvSpPr>
         <p:spPr>
           <a:xfrm>
-            <a:off x="6693408" y="2880360"/>
-            <a:ext cx="2267712" cy="2880360"/>
+            <a:off x="5276088" y="2880360"/>
+            <a:ext cx="1691640" cy="2926080"/>
           </a:xfrm>
           <a:prstGeom prst="rect">
             <a:avLst/>
@@ -6650,18 +6933,18 @@
           <a:bodyPr wrap="square" lIns="0" tIns="0" rIns="0" bIns="0" rtlCol="0" anchor="t"/>
           <a:lstStyle/>
           <a:p>
-            <a:pPr marL="152400" indent="-152400">
+            <a:pPr marL="139700" indent="-139700">
               <a:lnSpc>
-                <a:spcPts val="1500"/>
+                <a:spcPts val="1400"/>
               </a:lnSpc>
               <a:spcAft>
-                <a:spcPts val="800"/>
+                <a:spcPts val="700"/>
               </a:spcAft>
               <a:buSzPct val="100000"/>
               <a:buChar char="•"/>
             </a:pPr>
             <a:r>
-              <a:rPr lang="en-US" sz="1200" dirty="0">
+              <a:rPr lang="en-US" sz="1100" dirty="0">
                 <a:solidFill>
                   <a:srgbClr val="1A2233"/>
                 </a:solidFill>
@@ -6671,21 +6954,21 @@
               </a:rPr>
               <a:t>ネオキャリアとの窓口・調整</a:t>
             </a:r>
-            <a:endParaRPr lang="en-US" sz="1200" dirty="0"/>
-          </a:p>
-          <a:p>
-            <a:pPr marL="152400" indent="-152400">
+            <a:endParaRPr lang="en-US" sz="1100" dirty="0"/>
+          </a:p>
+          <a:p>
+            <a:pPr marL="139700" indent="-139700">
               <a:lnSpc>
-                <a:spcPts val="1500"/>
+                <a:spcPts val="1400"/>
               </a:lnSpc>
               <a:spcAft>
-                <a:spcPts val="800"/>
+                <a:spcPts val="700"/>
               </a:spcAft>
               <a:buSzPct val="100000"/>
               <a:buChar char="•"/>
             </a:pPr>
             <a:r>
-              <a:rPr lang="en-US" sz="1200" dirty="0">
+              <a:rPr lang="en-US" sz="1100" dirty="0">
                 <a:solidFill>
                   <a:srgbClr val="1A2233"/>
                 </a:solidFill>
@@ -6695,21 +6978,21 @@
               </a:rPr>
               <a:t>求人媒体管理・原稿修正</a:t>
             </a:r>
-            <a:endParaRPr lang="en-US" sz="1200" dirty="0"/>
-          </a:p>
-          <a:p>
-            <a:pPr marL="152400" indent="-152400">
+            <a:endParaRPr lang="en-US" sz="1100" dirty="0"/>
+          </a:p>
+          <a:p>
+            <a:pPr marL="139700" indent="-139700">
               <a:lnSpc>
-                <a:spcPts val="1500"/>
+                <a:spcPts val="1400"/>
               </a:lnSpc>
               <a:spcAft>
-                <a:spcPts val="800"/>
+                <a:spcPts val="700"/>
               </a:spcAft>
               <a:buSzPct val="100000"/>
               <a:buChar char="•"/>
             </a:pPr>
             <a:r>
-              <a:rPr lang="en-US" sz="1200" dirty="0">
+              <a:rPr lang="en-US" sz="1100" dirty="0">
                 <a:solidFill>
                   <a:srgbClr val="1A2233"/>
                 </a:solidFill>
@@ -6719,21 +7002,21 @@
               </a:rPr>
               <a:t>応募者管理・面接日程調整</a:t>
             </a:r>
-            <a:endParaRPr lang="en-US" sz="1200" dirty="0"/>
-          </a:p>
-          <a:p>
-            <a:pPr marL="152400" indent="-152400">
+            <a:endParaRPr lang="en-US" sz="1100" dirty="0"/>
+          </a:p>
+          <a:p>
+            <a:pPr marL="139700" indent="-139700">
               <a:lnSpc>
-                <a:spcPts val="1500"/>
+                <a:spcPts val="1400"/>
               </a:lnSpc>
               <a:spcAft>
-                <a:spcPts val="800"/>
+                <a:spcPts val="700"/>
               </a:spcAft>
               <a:buSzPct val="100000"/>
               <a:buChar char="•"/>
             </a:pPr>
             <a:r>
-              <a:rPr lang="en-US" sz="1200" dirty="0">
+              <a:rPr lang="en-US" sz="1100" dirty="0">
                 <a:solidFill>
                   <a:srgbClr val="1A2233"/>
                 </a:solidFill>
@@ -6743,7 +7026,7 @@
               </a:rPr>
               <a:t>面接対応・採用進捗管理</a:t>
             </a:r>
-            <a:endParaRPr lang="en-US" sz="1200" dirty="0"/>
+            <a:endParaRPr lang="en-US" sz="1100" dirty="0"/>
           </a:p>
         </p:txBody>
       </p:sp>
@@ -6755,12 +7038,12 @@
         </p:nvSpPr>
         <p:spPr>
           <a:xfrm>
-            <a:off x="9336024" y="1783080"/>
-            <a:ext cx="2724912" cy="4160520"/>
+            <a:off x="7324344" y="1783080"/>
+            <a:ext cx="2112264" cy="4160520"/>
           </a:xfrm>
           <a:prstGeom prst="roundRect">
             <a:avLst>
-              <a:gd name="adj" fmla="val 2685"/>
+              <a:gd name="adj" fmla="val 3463"/>
             </a:avLst>
           </a:prstGeom>
           <a:solidFill>
@@ -6789,7 +7072,7 @@
         </p:nvSpPr>
         <p:spPr>
           <a:xfrm>
-            <a:off x="9592056" y="2011680"/>
+            <a:off x="7580376" y="2011680"/>
             <a:ext cx="457200" cy="457200"/>
           </a:xfrm>
           <a:prstGeom prst="ellipse">
@@ -6809,8 +7092,8 @@
         </p:nvSpPr>
         <p:spPr>
           <a:xfrm>
-            <a:off x="10158984" y="1993392"/>
-            <a:ext cx="1810512" cy="320040"/>
+            <a:off x="8147304" y="1993392"/>
+            <a:ext cx="1197864" cy="320040"/>
           </a:xfrm>
           <a:prstGeom prst="rect">
             <a:avLst/>
@@ -6848,8 +7131,8 @@
         </p:nvSpPr>
         <p:spPr>
           <a:xfrm>
-            <a:off x="10158984" y="2304288"/>
-            <a:ext cx="1810512" cy="256032"/>
+            <a:off x="8147304" y="2304288"/>
+            <a:ext cx="1197864" cy="256032"/>
           </a:xfrm>
           <a:prstGeom prst="rect">
             <a:avLst/>
@@ -6887,8 +7170,8 @@
         </p:nvSpPr>
         <p:spPr>
           <a:xfrm>
-            <a:off x="9592056" y="2743200"/>
-            <a:ext cx="2212848" cy="0"/>
+            <a:off x="7580376" y="2743200"/>
+            <a:ext cx="1600200" cy="0"/>
           </a:xfrm>
           <a:prstGeom prst="line">
             <a:avLst/>
@@ -6910,8 +7193,8 @@
         </p:nvSpPr>
         <p:spPr>
           <a:xfrm>
-            <a:off x="9592056" y="2880360"/>
-            <a:ext cx="2267712" cy="2880360"/>
+            <a:off x="7562088" y="2880360"/>
+            <a:ext cx="1691640" cy="2926080"/>
           </a:xfrm>
           <a:prstGeom prst="rect">
             <a:avLst/>
@@ -6923,18 +7206,18 @@
           <a:bodyPr wrap="square" lIns="0" tIns="0" rIns="0" bIns="0" rtlCol="0" anchor="t"/>
           <a:lstStyle/>
           <a:p>
-            <a:pPr marL="152400" indent="-152400">
+            <a:pPr marL="139700" indent="-139700">
               <a:lnSpc>
-                <a:spcPts val="1500"/>
+                <a:spcPts val="1400"/>
               </a:lnSpc>
               <a:spcAft>
-                <a:spcPts val="800"/>
+                <a:spcPts val="700"/>
               </a:spcAft>
               <a:buSzPct val="100000"/>
               <a:buChar char="•"/>
             </a:pPr>
             <a:r>
-              <a:rPr lang="en-US" sz="1200" dirty="0">
+              <a:rPr lang="en-US" sz="1100" dirty="0">
                 <a:solidFill>
                   <a:srgbClr val="1A2233"/>
                 </a:solidFill>
@@ -6944,21 +7227,21 @@
               </a:rPr>
               <a:t>制度設計</a:t>
             </a:r>
-            <a:endParaRPr lang="en-US" sz="1200" dirty="0"/>
-          </a:p>
-          <a:p>
-            <a:pPr marL="152400" indent="-152400">
+            <a:endParaRPr lang="en-US" sz="1100" dirty="0"/>
+          </a:p>
+          <a:p>
+            <a:pPr marL="139700" indent="-139700">
               <a:lnSpc>
-                <a:spcPts val="1500"/>
+                <a:spcPts val="1400"/>
               </a:lnSpc>
               <a:spcAft>
-                <a:spcPts val="800"/>
+                <a:spcPts val="700"/>
               </a:spcAft>
               <a:buSzPct val="100000"/>
               <a:buChar char="•"/>
             </a:pPr>
             <a:r>
-              <a:rPr lang="en-US" sz="1200" dirty="0">
+              <a:rPr lang="en-US" sz="1100" dirty="0">
                 <a:solidFill>
                   <a:srgbClr val="1A2233"/>
                 </a:solidFill>
@@ -6968,21 +7251,21 @@
               </a:rPr>
               <a:t>労務確認</a:t>
             </a:r>
-            <a:endParaRPr lang="en-US" sz="1200" dirty="0"/>
-          </a:p>
-          <a:p>
-            <a:pPr marL="152400" indent="-152400">
+            <a:endParaRPr lang="en-US" sz="1100" dirty="0"/>
+          </a:p>
+          <a:p>
+            <a:pPr marL="139700" indent="-139700">
               <a:lnSpc>
-                <a:spcPts val="1500"/>
+                <a:spcPts val="1400"/>
               </a:lnSpc>
               <a:spcAft>
-                <a:spcPts val="800"/>
+                <a:spcPts val="700"/>
               </a:spcAft>
               <a:buSzPct val="100000"/>
               <a:buChar char="•"/>
             </a:pPr>
             <a:r>
-              <a:rPr lang="en-US" sz="1200" dirty="0">
+              <a:rPr lang="en-US" sz="1100" dirty="0">
                 <a:solidFill>
                   <a:srgbClr val="1A2233"/>
                 </a:solidFill>
@@ -6992,21 +7275,21 @@
               </a:rPr>
               <a:t>雇用条件確認</a:t>
             </a:r>
-            <a:endParaRPr lang="en-US" sz="1200" dirty="0"/>
-          </a:p>
-          <a:p>
-            <a:pPr marL="152400" indent="-152400">
+            <a:endParaRPr lang="en-US" sz="1100" dirty="0"/>
+          </a:p>
+          <a:p>
+            <a:pPr marL="139700" indent="-139700">
               <a:lnSpc>
-                <a:spcPts val="1500"/>
+                <a:spcPts val="1400"/>
               </a:lnSpc>
               <a:spcAft>
-                <a:spcPts val="800"/>
+                <a:spcPts val="700"/>
               </a:spcAft>
               <a:buSzPct val="100000"/>
               <a:buChar char="•"/>
             </a:pPr>
             <a:r>
-              <a:rPr lang="en-US" sz="1200" dirty="0">
+              <a:rPr lang="en-US" sz="1100" dirty="0">
                 <a:solidFill>
                   <a:srgbClr val="1A2233"/>
                 </a:solidFill>
@@ -7016,13 +7299,286 @@
               </a:rPr>
               <a:t>社会保険等の制度確認</a:t>
             </a:r>
-            <a:endParaRPr lang="en-US" sz="1200" dirty="0"/>
-          </a:p>
-        </p:txBody>
-      </p:sp>
-      <p:sp>
-        <p:nvSpPr>
-          <p:cNvPr id="28" name="Text 26"/>
+            <a:endParaRPr lang="en-US" sz="1100" dirty="0"/>
+          </a:p>
+        </p:txBody>
+      </p:sp>
+      <p:sp>
+        <p:nvSpPr>
+          <p:cNvPr id="28" name="Shape 26"/>
+          <p:cNvSpPr/>
+          <p:nvPr/>
+        </p:nvSpPr>
+        <p:spPr>
+          <a:xfrm>
+            <a:off x="9610344" y="1783080"/>
+            <a:ext cx="2112264" cy="4160520"/>
+          </a:xfrm>
+          <a:prstGeom prst="roundRect">
+            <a:avLst>
+              <a:gd name="adj" fmla="val 3463"/>
+            </a:avLst>
+          </a:prstGeom>
+          <a:solidFill>
+            <a:srgbClr val="FFFFFF"/>
+          </a:solidFill>
+          <a:ln w="12700">
+            <a:solidFill>
+              <a:srgbClr val="D5DEEC"/>
+            </a:solidFill>
+            <a:prstDash val="solid"/>
+          </a:ln>
+          <a:effectLst>
+            <a:outerShdw sx="100000" sy="100000" kx="0" ky="0" algn="bl" rotWithShape="0" blurRad="88900" dist="25400" dir="5400000">
+              <a:srgbClr val="9AA7BC">
+                <a:alpha val="30000"/>
+              </a:srgbClr>
+            </a:outerShdw>
+          </a:effectLst>
+        </p:spPr>
+      </p:sp>
+      <p:sp>
+        <p:nvSpPr>
+          <p:cNvPr id="29" name="Shape 27"/>
+          <p:cNvSpPr/>
+          <p:nvPr/>
+        </p:nvSpPr>
+        <p:spPr>
+          <a:xfrm>
+            <a:off x="9866376" y="2011680"/>
+            <a:ext cx="457200" cy="457200"/>
+          </a:xfrm>
+          <a:prstGeom prst="ellipse">
+            <a:avLst/>
+          </a:prstGeom>
+          <a:solidFill>
+            <a:srgbClr val="6D5B9C"/>
+          </a:solidFill>
+          <a:ln/>
+        </p:spPr>
+      </p:sp>
+      <p:sp>
+        <p:nvSpPr>
+          <p:cNvPr id="30" name="Text 28"/>
+          <p:cNvSpPr/>
+          <p:nvPr/>
+        </p:nvSpPr>
+        <p:spPr>
+          <a:xfrm>
+            <a:off x="10433304" y="1993392"/>
+            <a:ext cx="1197864" cy="320040"/>
+          </a:xfrm>
+          <a:prstGeom prst="rect">
+            <a:avLst/>
+          </a:prstGeom>
+          <a:noFill/>
+          <a:ln/>
+        </p:spPr>
+        <p:txBody>
+          <a:bodyPr wrap="square" lIns="0" tIns="0" rIns="0" bIns="0" rtlCol="0" anchor="ctr"/>
+          <a:lstStyle/>
+          <a:p>
+            <a:pPr indent="0" marL="0">
+              <a:buNone/>
+            </a:pPr>
+            <a:r>
+              <a:rPr lang="en-US" sz="1600" b="1" dirty="0">
+                <a:solidFill>
+                  <a:srgbClr val="1A2233"/>
+                </a:solidFill>
+                <a:latin typeface="Meiryo" pitchFamily="34" charset="0"/>
+                <a:ea typeface="Meiryo" pitchFamily="34" charset="-122"/>
+                <a:cs typeface="Meiryo" pitchFamily="34" charset="-120"/>
+              </a:rPr>
+              <a:t>坂本</a:t>
+            </a:r>
+            <a:endParaRPr lang="en-US" sz="1600" dirty="0"/>
+          </a:p>
+        </p:txBody>
+      </p:sp>
+      <p:sp>
+        <p:nvSpPr>
+          <p:cNvPr id="31" name="Text 29"/>
+          <p:cNvSpPr/>
+          <p:nvPr/>
+        </p:nvSpPr>
+        <p:spPr>
+          <a:xfrm>
+            <a:off x="10433304" y="2304288"/>
+            <a:ext cx="1197864" cy="256032"/>
+          </a:xfrm>
+          <a:prstGeom prst="rect">
+            <a:avLst/>
+          </a:prstGeom>
+          <a:noFill/>
+          <a:ln/>
+        </p:spPr>
+        <p:txBody>
+          <a:bodyPr wrap="square" lIns="0" tIns="0" rIns="0" bIns="0" rtlCol="0" anchor="ctr"/>
+          <a:lstStyle/>
+          <a:p>
+            <a:pPr indent="0" marL="0">
+              <a:buNone/>
+            </a:pPr>
+            <a:r>
+              <a:rPr lang="en-US" sz="1100" b="1" dirty="0">
+                <a:solidFill>
+                  <a:srgbClr val="6D5B9C"/>
+                </a:solidFill>
+                <a:latin typeface="Meiryo" pitchFamily="34" charset="0"/>
+                <a:ea typeface="Meiryo" pitchFamily="34" charset="-122"/>
+                <a:cs typeface="Meiryo" pitchFamily="34" charset="-120"/>
+              </a:rPr>
+              <a:t>現場調整窓口</a:t>
+            </a:r>
+            <a:endParaRPr lang="en-US" sz="1100" dirty="0"/>
+          </a:p>
+        </p:txBody>
+      </p:sp>
+      <p:sp>
+        <p:nvSpPr>
+          <p:cNvPr id="32" name="Shape 30"/>
+          <p:cNvSpPr/>
+          <p:nvPr/>
+        </p:nvSpPr>
+        <p:spPr>
+          <a:xfrm>
+            <a:off x="9866376" y="2743200"/>
+            <a:ext cx="1600200" cy="0"/>
+          </a:xfrm>
+          <a:prstGeom prst="line">
+            <a:avLst/>
+          </a:prstGeom>
+          <a:noFill/>
+          <a:ln w="12700">
+            <a:solidFill>
+              <a:srgbClr val="D5DEEC"/>
+            </a:solidFill>
+            <a:prstDash val="solid"/>
+          </a:ln>
+        </p:spPr>
+      </p:sp>
+      <p:sp>
+        <p:nvSpPr>
+          <p:cNvPr id="33" name="Text 31"/>
+          <p:cNvSpPr/>
+          <p:nvPr/>
+        </p:nvSpPr>
+        <p:spPr>
+          <a:xfrm>
+            <a:off x="9848088" y="2880360"/>
+            <a:ext cx="1691640" cy="2926080"/>
+          </a:xfrm>
+          <a:prstGeom prst="rect">
+            <a:avLst/>
+          </a:prstGeom>
+          <a:noFill/>
+          <a:ln/>
+        </p:spPr>
+        <p:txBody>
+          <a:bodyPr wrap="square" lIns="0" tIns="0" rIns="0" bIns="0" rtlCol="0" anchor="t"/>
+          <a:lstStyle/>
+          <a:p>
+            <a:pPr marL="139700" indent="-139700">
+              <a:lnSpc>
+                <a:spcPts val="1400"/>
+              </a:lnSpc>
+              <a:spcAft>
+                <a:spcPts val="700"/>
+              </a:spcAft>
+              <a:buSzPct val="100000"/>
+              <a:buChar char="•"/>
+            </a:pPr>
+            <a:r>
+              <a:rPr lang="en-US" sz="1100" dirty="0">
+                <a:solidFill>
+                  <a:srgbClr val="1A2233"/>
+                </a:solidFill>
+                <a:latin typeface="Meiryo" pitchFamily="34" charset="0"/>
+                <a:ea typeface="Meiryo" pitchFamily="34" charset="-122"/>
+                <a:cs typeface="Meiryo" pitchFamily="34" charset="-120"/>
+              </a:rPr>
+              <a:t>入社〜入社後のフォロー</a:t>
+            </a:r>
+            <a:endParaRPr lang="en-US" sz="1100" dirty="0"/>
+          </a:p>
+          <a:p>
+            <a:pPr marL="139700" indent="-139700">
+              <a:lnSpc>
+                <a:spcPts val="1400"/>
+              </a:lnSpc>
+              <a:spcAft>
+                <a:spcPts val="700"/>
+              </a:spcAft>
+              <a:buSzPct val="100000"/>
+              <a:buChar char="•"/>
+            </a:pPr>
+            <a:r>
+              <a:rPr lang="en-US" sz="1100" dirty="0">
+                <a:solidFill>
+                  <a:srgbClr val="1A2233"/>
+                </a:solidFill>
+                <a:latin typeface="Meiryo" pitchFamily="34" charset="0"/>
+                <a:ea typeface="Meiryo" pitchFamily="34" charset="-122"/>
+                <a:cs typeface="Meiryo" pitchFamily="34" charset="-120"/>
+              </a:rPr>
+              <a:t>現場調整の窓口対応</a:t>
+            </a:r>
+            <a:endParaRPr lang="en-US" sz="1100" dirty="0"/>
+          </a:p>
+          <a:p>
+            <a:pPr marL="139700" indent="-139700">
+              <a:lnSpc>
+                <a:spcPts val="1400"/>
+              </a:lnSpc>
+              <a:spcAft>
+                <a:spcPts val="700"/>
+              </a:spcAft>
+              <a:buSzPct val="100000"/>
+              <a:buChar char="•"/>
+            </a:pPr>
+            <a:r>
+              <a:rPr lang="en-US" sz="1100" dirty="0">
+                <a:solidFill>
+                  <a:srgbClr val="1A2233"/>
+                </a:solidFill>
+                <a:latin typeface="Meiryo" pitchFamily="34" charset="0"/>
+                <a:ea typeface="Meiryo" pitchFamily="34" charset="-122"/>
+                <a:cs typeface="Meiryo" pitchFamily="34" charset="-120"/>
+              </a:rPr>
+              <a:t>トラブル・相談対応</a:t>
+            </a:r>
+            <a:endParaRPr lang="en-US" sz="1100" dirty="0"/>
+          </a:p>
+          <a:p>
+            <a:pPr marL="139700" indent="-139700">
+              <a:lnSpc>
+                <a:spcPts val="1400"/>
+              </a:lnSpc>
+              <a:spcAft>
+                <a:spcPts val="700"/>
+              </a:spcAft>
+              <a:buSzPct val="100000"/>
+              <a:buChar char="•"/>
+            </a:pPr>
+            <a:r>
+              <a:rPr lang="en-US" sz="1100" dirty="0">
+                <a:solidFill>
+                  <a:srgbClr val="1A2233"/>
+                </a:solidFill>
+                <a:latin typeface="Meiryo" pitchFamily="34" charset="0"/>
+                <a:ea typeface="Meiryo" pitchFamily="34" charset="-122"/>
+                <a:cs typeface="Meiryo" pitchFamily="34" charset="-120"/>
+              </a:rPr>
+              <a:t>定着支援・早期離職の防止</a:t>
+            </a:r>
+            <a:endParaRPr lang="en-US" sz="1100" dirty="0"/>
+          </a:p>
+        </p:txBody>
+      </p:sp>
+      <p:sp>
+        <p:nvSpPr>
+          <p:cNvPr id="34" name="Text 32"/>
           <p:cNvSpPr/>
           <p:nvPr/>
         </p:nvSpPr>
@@ -7061,7 +7617,7 @@
       </p:sp>
       <p:sp>
         <p:nvSpPr>
-          <p:cNvPr id="29" name="Text 27"/>
+          <p:cNvPr id="35" name="Text 33"/>
           <p:cNvSpPr/>
           <p:nvPr/>
         </p:nvSpPr>
